--- a/AI漫剧制作课程/PPT课件/模块15-分发变现.pptx
+++ b/AI漫剧制作课程/PPT课件/模块15-分发变现.pptx
@@ -13561,7 +13561,7 @@
               </a:defRPr>
             </a:pPr>
             <a:r>
-              <a:t>🛠️  本模块实操任务</a:t>
+              <a:t>◆  本模块实操任务</a:t>
             </a:r>
           </a:p>
         </p:txBody>
@@ -17328,7 +17328,7 @@
               </a:defRPr>
             </a:pPr>
             <a:r>
-              <a:t>✓</a:t>
+              <a:t>◆</a:t>
             </a:r>
           </a:p>
         </p:txBody>
@@ -19445,7 +19445,7 @@
               </a:defRPr>
             </a:pPr>
             <a:r>
-              <a:t>📋  本节内容</a:t>
+              <a:t>§  本节内容</a:t>
             </a:r>
           </a:p>
         </p:txBody>
@@ -21407,7 +21407,7 @@
               </a:defRPr>
             </a:pPr>
             <a:r>
-              <a:t>📊  💰 变现阶梯与收入预期</a:t>
+              <a:t>▤  ¥ 变现阶梯与收入预期</a:t>
             </a:r>
           </a:p>
         </p:txBody>
